--- a/public/fun/pack/pptx/wedding/결혼식_30_감사·답례중심_빨간우체통.pptx
+++ b/public/fun/pack/pptx/wedding/결혼식_30_감사·답례중심_빨간우체통.pptx
@@ -3286,6 +3286,14 @@
 <file path=ppt/slides/slide1.xml><?xml version="1.0" encoding="utf-8"?>
 <p:sld xmlns:a="http://schemas.openxmlformats.org/drawingml/2006/main" xmlns:p="http://schemas.openxmlformats.org/presentationml/2006/main" xmlns:r="http://schemas.openxmlformats.org/officeDocument/2006/relationships">
   <p:cSld>
+    <p:bg>
+      <p:bgPr>
+        <a:solidFill>
+          <a:srgbClr val="FBEFEC"/>
+        </a:solidFill>
+        <a:effectLst/>
+      </p:bgPr>
+    </p:bg>
     <p:spTree>
       <p:nvGrpSpPr>
         <p:cNvPr id="1" name=""/>
@@ -3293,30 +3301,120 @@
         <p:nvPr/>
       </p:nvGrpSpPr>
       <p:grpSpPr/>
-      <p:pic>
-        <p:nvPicPr>
-          <p:cNvPr id="3" name="표지 그림" descr="wedding-30.jpg"/>
-          <p:cNvPicPr>
-            <a:picLocks noChangeAspect="1"/>
-          </p:cNvPicPr>
+      <p:sp>
+        <p:nvSpPr>
+          <p:cNvPr id="3" name="사진 자리"/>
+          <p:cNvSpPr/>
           <p:nvPr/>
-        </p:nvPicPr>
-        <p:blipFill>
-          <a:blip r:embed="rId2"/>
-          <a:stretch>
-            <a:fillRect/>
-          </a:stretch>
-        </p:blipFill>
-        <p:spPr>
-          <a:xfrm>
-            <a:off x="0" y="0"/>
-            <a:ext cx="12191695" cy="6858000"/>
+        </p:nvSpPr>
+        <p:spPr>
+          <a:xfrm>
+            <a:off x="7071183" y="960120"/>
+            <a:ext cx="3657508" cy="4526280"/>
+          </a:xfrm>
+          <a:prstGeom prst="roundRect">
+            <a:avLst>
+              <a:gd name="adj" fmla="val 4000"/>
+            </a:avLst>
+          </a:prstGeom>
+          <a:solidFill>
+            <a:srgbClr val="EBBAAD"/>
+          </a:solidFill>
+          <a:ln>
+            <a:noFill/>
+          </a:ln>
+        </p:spPr>
+        <p:txBody>
+          <a:bodyPr rtlCol="0" anchor="ctr" wrap="square" lIns="54864" rIns="54864" tIns="27432" bIns="27432">
+            <a:noAutofit/>
+          </a:bodyPr>
+          <a:lstStyle/>
+          <a:p>
+            <a:pPr algn="ctr">
+              <a:lnSpc>
+                <a:spcPct val="100000"/>
+              </a:lnSpc>
+            </a:pPr>
+            <a:r>
+              <a:rPr sz="1400" b="0" i="0">
+                <a:solidFill>
+                  <a:srgbClr val="492E27"/>
+                </a:solidFill>
+              </a:rPr>
+              <a:t>사진을 넣어 주세요</a:t>
+            </a:r>
+          </a:p>
+        </p:txBody>
+      </p:sp>
+      <p:sp>
+        <p:nvSpPr>
+          <p:cNvPr id="4" name="장식"/>
+          <p:cNvSpPr/>
+          <p:nvPr/>
+        </p:nvSpPr>
+        <p:spPr>
+          <a:xfrm>
+            <a:off x="7558851" y="1234439"/>
+            <a:ext cx="3657508" cy="4526280"/>
+          </a:xfrm>
+          <a:prstGeom prst="roundRect">
+            <a:avLst>
+              <a:gd name="adj" fmla="val 4000"/>
+            </a:avLst>
+          </a:prstGeom>
+          <a:noFill/>
+          <a:ln w="9525">
+            <a:solidFill>
+              <a:srgbClr val="26231F"/>
+            </a:solidFill>
+          </a:ln>
+        </p:spPr>
+        <p:txBody>
+          <a:bodyPr rtlCol="0" anchor="ctr"/>
+          <a:lstStyle/>
+          <a:p>
+            <a:pPr algn="ctr"/>
+          </a:p>
+        </p:txBody>
+      </p:sp>
+      <p:sp>
+        <p:nvSpPr>
+          <p:cNvPr id="5" name="라벨"/>
+          <p:cNvSpPr txBox="1"/>
+          <p:nvPr/>
+        </p:nvSpPr>
+        <p:spPr>
+          <a:xfrm>
+            <a:off x="822960" y="2148840"/>
+            <a:ext cx="5608179" cy="274320"/>
           </a:xfrm>
           <a:prstGeom prst="rect">
             <a:avLst/>
           </a:prstGeom>
-        </p:spPr>
-      </p:pic>
+          <a:noFill/>
+        </p:spPr>
+        <p:txBody>
+          <a:bodyPr wrap="square" lIns="54864" rIns="54864" tIns="27432" bIns="27432" anchor="t">
+            <a:noAutofit/>
+          </a:bodyPr>
+          <a:lstStyle/>
+          <a:p>
+            <a:pPr algn="l">
+              <a:lnSpc>
+                <a:spcPct val="115000"/>
+              </a:lnSpc>
+            </a:pPr>
+            <a:r>
+              <a:rPr sz="1000" b="1" i="0" spc="250">
+                <a:solidFill>
+                  <a:srgbClr val="26231F"/>
+                </a:solidFill>
+              </a:rPr>
+              <a:t>WEDDING</a:t>
+            </a:r>
+          </a:p>
+        </p:txBody>
+      </p:sp>
       <p:sp>
         <p:nvSpPr>
           <p:cNvPr id="2" name="Title 1"/>
@@ -3329,8 +3427,8 @@
         </p:nvSpPr>
         <p:spPr>
           <a:xfrm>
-            <a:off x="853418" y="2057400"/>
-            <a:ext cx="6095847" cy="1554480"/>
+            <a:off x="822960" y="2606040"/>
+            <a:ext cx="5608179" cy="1188720"/>
           </a:xfrm>
         </p:spPr>
         <p:txBody>
@@ -3347,7 +3445,7 @@
             <a:r>
               <a:rPr sz="3600" b="1" i="0">
                 <a:solidFill>
-                  <a:srgbClr val="5B2315"/>
+                  <a:srgbClr val="26231F"/>
                 </a:solidFill>
               </a:rPr>
               <a:t>저희 결혼합니다</a:t>
@@ -3357,14 +3455,14 @@
       </p:sp>
       <p:sp>
         <p:nvSpPr>
-          <p:cNvPr id="4" name="한 줄 문구"/>
+          <p:cNvPr id="6" name="한 줄 문구"/>
           <p:cNvSpPr txBox="1"/>
           <p:nvPr/>
         </p:nvSpPr>
         <p:spPr>
           <a:xfrm>
-            <a:off x="853418" y="3749039"/>
-            <a:ext cx="6095847" cy="822960"/>
+            <a:off x="822960" y="3886200"/>
+            <a:ext cx="5608179" cy="822960"/>
           </a:xfrm>
           <a:prstGeom prst="rect">
             <a:avLst/>
@@ -3383,9 +3481,9 @@
               </a:lnSpc>
             </a:pPr>
             <a:r>
-              <a:rPr sz="1700" b="0" i="1">
-                <a:solidFill>
-                  <a:srgbClr val="5B2315"/>
+              <a:rPr sz="1700" b="0" i="0">
+                <a:solidFill>
+                  <a:srgbClr val="26231F"/>
                 </a:solidFill>
               </a:rPr>
               <a:t>먼 길 와 주신 분들께 특별히 인사드립니다</a:t>
@@ -3395,14 +3493,14 @@
       </p:sp>
       <p:sp>
         <p:nvSpPr>
-          <p:cNvPr id="5" name="안내 문구"/>
+          <p:cNvPr id="7" name="안내 문구"/>
           <p:cNvSpPr txBox="1"/>
           <p:nvPr/>
         </p:nvSpPr>
         <p:spPr>
           <a:xfrm>
-            <a:off x="853418" y="4617720"/>
-            <a:ext cx="6095847" cy="914400"/>
+            <a:off x="822960" y="4754880"/>
+            <a:ext cx="5608179" cy="914400"/>
           </a:xfrm>
           <a:prstGeom prst="rect">
             <a:avLst/>
@@ -3423,7 +3521,7 @@
             <a:r>
               <a:rPr sz="1400" b="0" i="0">
                 <a:solidFill>
-                  <a:srgbClr val="666666"/>
+                  <a:srgbClr val="26231F"/>
                 </a:solidFill>
               </a:rPr>
               <a:t>신랑 이름 ♥ 신부 이름</a:t>
@@ -3438,10 +3536,10 @@
             <a:r>
               <a:rPr sz="1400" b="0" i="0">
                 <a:solidFill>
-                  <a:srgbClr val="666666"/>
+                  <a:srgbClr val="26231F"/>
                 </a:solidFill>
               </a:rPr>
-              <a:t>2027. 00. 00 · 예식장 이름</a:t>
+              <a:t>날짜 입력 · 예식장 이름</a:t>
             </a:r>
           </a:p>
         </p:txBody>
@@ -3460,7 +3558,7 @@
     <p:bg>
       <p:bgPr>
         <a:solidFill>
-          <a:srgbClr val="FBF1EE"/>
+          <a:srgbClr val="FBEFEC"/>
         </a:solidFill>
         <a:effectLst/>
       </p:bgPr>
@@ -3479,18 +3577,17 @@
           <p:nvPr/>
         </p:nvSpPr>
         <p:spPr>
-          <a:xfrm rot="10800000">
-            <a:off x="10637215" y="0"/>
-            <a:ext cx="914400" cy="1554480"/>
-          </a:xfrm>
-          <a:prstGeom prst="round2SameRect">
+          <a:xfrm>
+            <a:off x="640080" y="566928"/>
+            <a:ext cx="64008" cy="868680"/>
+          </a:xfrm>
+          <a:prstGeom prst="roundRect">
             <a:avLst>
-              <a:gd name="adj1" fmla="val 50000"/>
-              <a:gd name="adj2" fmla="val 0"/>
+              <a:gd name="adj" fmla="val 50000"/>
             </a:avLst>
           </a:prstGeom>
           <a:solidFill>
-            <a:srgbClr val="F5D4CC"/>
+            <a:srgbClr val="D88C79"/>
           </a:solidFill>
           <a:ln>
             <a:noFill/>
@@ -3506,6 +3603,73 @@
       </p:sp>
       <p:sp>
         <p:nvSpPr>
+          <p:cNvPr id="4" name="상단 라벨"/>
+          <p:cNvSpPr txBox="1"/>
+          <p:nvPr/>
+        </p:nvSpPr>
+        <p:spPr>
+          <a:xfrm>
+            <a:off x="868680" y="274320"/>
+            <a:ext cx="5486400" cy="274320"/>
+          </a:xfrm>
+          <a:prstGeom prst="rect">
+            <a:avLst/>
+          </a:prstGeom>
+          <a:noFill/>
+        </p:spPr>
+        <p:txBody>
+          <a:bodyPr wrap="square" lIns="54864" rIns="54864" tIns="27432" bIns="27432" anchor="ctr">
+            <a:noAutofit/>
+          </a:bodyPr>
+          <a:lstStyle/>
+          <a:p>
+            <a:pPr algn="l">
+              <a:lnSpc>
+                <a:spcPct val="115000"/>
+              </a:lnSpc>
+            </a:pPr>
+            <a:r>
+              <a:rPr sz="900" b="1" i="0" spc="250">
+                <a:solidFill>
+                  <a:srgbClr val="8E8780"/>
+                </a:solidFill>
+              </a:rPr>
+              <a:t>WEDDING</a:t>
+            </a:r>
+          </a:p>
+        </p:txBody>
+      </p:sp>
+      <p:sp>
+        <p:nvSpPr>
+          <p:cNvPr id="5" name="포인트"/>
+          <p:cNvSpPr/>
+          <p:nvPr/>
+        </p:nvSpPr>
+        <p:spPr>
+          <a:xfrm rot="18900000">
+            <a:off x="11167567" y="667512"/>
+            <a:ext cx="310896" cy="310896"/>
+          </a:xfrm>
+          <a:prstGeom prst="teardrop">
+            <a:avLst/>
+          </a:prstGeom>
+          <a:solidFill>
+            <a:srgbClr val="EBBAAD"/>
+          </a:solidFill>
+          <a:ln>
+            <a:noFill/>
+          </a:ln>
+        </p:spPr>
+        <p:txBody>
+          <a:bodyPr rtlCol="0" anchor="ctr"/>
+          <a:lstStyle/>
+          <a:p>
+            <a:pPr algn="ctr"/>
+          </a:p>
+        </p:txBody>
+      </p:sp>
+      <p:sp>
+        <p:nvSpPr>
           <p:cNvPr id="2" name="Title 1"/>
           <p:cNvSpPr>
             <a:spLocks noGrp="1"/>
@@ -3516,8 +3680,8 @@
         </p:nvSpPr>
         <p:spPr>
           <a:xfrm>
-            <a:off x="640080" y="457200"/>
-            <a:ext cx="9722815" cy="868680"/>
+            <a:off x="868680" y="566928"/>
+            <a:ext cx="9448495" cy="868680"/>
           </a:xfrm>
         </p:spPr>
         <p:txBody>
@@ -3534,7 +3698,7 @@
             <a:r>
               <a:rPr sz="3000" b="1" i="0">
                 <a:solidFill>
-                  <a:srgbClr val="5B2315"/>
+                  <a:srgbClr val="26231F"/>
                 </a:solidFill>
               </a:rPr>
               <a:t>신랑 · 신부 소개</a:t>
@@ -3544,25 +3708,23 @@
       </p:sp>
       <p:sp>
         <p:nvSpPr>
-          <p:cNvPr id="4" name="사진 자리"/>
+          <p:cNvPr id="6" name="사진 자리"/>
           <p:cNvSpPr/>
           <p:nvPr/>
         </p:nvSpPr>
         <p:spPr>
           <a:xfrm>
-            <a:off x="1939213" y="1600200"/>
-            <a:ext cx="2400300" cy="2400300"/>
+            <a:off x="1996363" y="1783080"/>
+            <a:ext cx="2286000" cy="2286000"/>
           </a:xfrm>
           <a:prstGeom prst="ellipse">
             <a:avLst/>
           </a:prstGeom>
           <a:solidFill>
-            <a:srgbClr val="F5D4CC"/>
+            <a:srgbClr val="F6DCD5"/>
           </a:solidFill>
           <a:ln w="19050">
-            <a:solidFill>
-              <a:srgbClr val="AE4329"/>
-            </a:solidFill>
+            <a:noFill/>
             <a:prstDash val="dash"/>
           </a:ln>
         </p:spPr>
@@ -3580,7 +3742,7 @@
             <a:r>
               <a:rPr sz="1200" b="0" i="0">
                 <a:solidFill>
-                  <a:srgbClr val="5B2315"/>
+                  <a:srgbClr val="8E8780"/>
                 </a:solidFill>
               </a:rPr>
               <a:t>사진</a:t>
@@ -3590,13 +3752,13 @@
       </p:sp>
       <p:sp>
         <p:nvSpPr>
-          <p:cNvPr id="5" name="TextBox 4"/>
+          <p:cNvPr id="7" name="TextBox 6"/>
           <p:cNvSpPr txBox="1"/>
           <p:nvPr/>
         </p:nvSpPr>
         <p:spPr>
           <a:xfrm>
-            <a:off x="640080" y="4091939"/>
+            <a:off x="640080" y="4160520"/>
             <a:ext cx="4998567" cy="411480"/>
           </a:xfrm>
           <a:prstGeom prst="rect">
@@ -3618,7 +3780,7 @@
             <a:r>
               <a:rPr sz="1600" b="1" i="0">
                 <a:solidFill>
-                  <a:srgbClr val="5B2315"/>
+                  <a:srgbClr val="492E27"/>
                 </a:solidFill>
               </a:rPr>
               <a:t>신랑</a:t>
@@ -3628,14 +3790,14 @@
       </p:sp>
       <p:sp>
         <p:nvSpPr>
-          <p:cNvPr id="6" name="TextBox 5"/>
+          <p:cNvPr id="8" name="TextBox 7"/>
           <p:cNvSpPr txBox="1"/>
           <p:nvPr/>
         </p:nvSpPr>
         <p:spPr>
           <a:xfrm>
-            <a:off x="731519" y="4549140"/>
-            <a:ext cx="4815687" cy="1851660"/>
+            <a:off x="731519" y="4617720"/>
+            <a:ext cx="4815687" cy="1737360"/>
           </a:xfrm>
           <a:prstGeom prst="rect">
             <a:avLst/>
@@ -3696,25 +3858,23 @@
       </p:sp>
       <p:sp>
         <p:nvSpPr>
-          <p:cNvPr id="7" name="사진 자리"/>
+          <p:cNvPr id="9" name="사진 자리"/>
           <p:cNvSpPr/>
           <p:nvPr/>
         </p:nvSpPr>
         <p:spPr>
           <a:xfrm>
-            <a:off x="7852181" y="1600200"/>
-            <a:ext cx="2400300" cy="2400300"/>
+            <a:off x="7909331" y="1783080"/>
+            <a:ext cx="2286000" cy="2286000"/>
           </a:xfrm>
           <a:prstGeom prst="ellipse">
             <a:avLst/>
           </a:prstGeom>
           <a:solidFill>
-            <a:srgbClr val="F5D4CC"/>
+            <a:srgbClr val="F6DCD5"/>
           </a:solidFill>
           <a:ln w="19050">
-            <a:solidFill>
-              <a:srgbClr val="AE4329"/>
-            </a:solidFill>
+            <a:noFill/>
             <a:prstDash val="dash"/>
           </a:ln>
         </p:spPr>
@@ -3732,7 +3892,7 @@
             <a:r>
               <a:rPr sz="1200" b="0" i="0">
                 <a:solidFill>
-                  <a:srgbClr val="5B2315"/>
+                  <a:srgbClr val="8E8780"/>
                 </a:solidFill>
               </a:rPr>
               <a:t>사진</a:t>
@@ -3742,13 +3902,13 @@
       </p:sp>
       <p:sp>
         <p:nvSpPr>
-          <p:cNvPr id="8" name="TextBox 7"/>
+          <p:cNvPr id="10" name="TextBox 9"/>
           <p:cNvSpPr txBox="1"/>
           <p:nvPr/>
         </p:nvSpPr>
         <p:spPr>
           <a:xfrm>
-            <a:off x="6553047" y="4091939"/>
+            <a:off x="6553047" y="4160520"/>
             <a:ext cx="4998567" cy="411480"/>
           </a:xfrm>
           <a:prstGeom prst="rect">
@@ -3770,7 +3930,7 @@
             <a:r>
               <a:rPr sz="1600" b="1" i="0">
                 <a:solidFill>
-                  <a:srgbClr val="5B2315"/>
+                  <a:srgbClr val="492E27"/>
                 </a:solidFill>
               </a:rPr>
               <a:t>신부</a:t>
@@ -3780,14 +3940,14 @@
       </p:sp>
       <p:sp>
         <p:nvSpPr>
-          <p:cNvPr id="9" name="TextBox 8"/>
+          <p:cNvPr id="11" name="TextBox 10"/>
           <p:cNvSpPr txBox="1"/>
           <p:nvPr/>
         </p:nvSpPr>
         <p:spPr>
           <a:xfrm>
-            <a:off x="6644487" y="4549140"/>
-            <a:ext cx="4815687" cy="1851660"/>
+            <a:off x="6644487" y="4617720"/>
+            <a:ext cx="4815687" cy="1737360"/>
           </a:xfrm>
           <a:prstGeom prst="rect">
             <a:avLst/>
@@ -3860,7 +4020,7 @@
     <p:bg>
       <p:bgPr>
         <a:solidFill>
-          <a:srgbClr val="FBF1EE"/>
+          <a:srgbClr val="FBEFEC"/>
         </a:solidFill>
         <a:effectLst/>
       </p:bgPr>
@@ -3879,18 +4039,17 @@
           <p:nvPr/>
         </p:nvSpPr>
         <p:spPr>
-          <a:xfrm rot="10800000">
-            <a:off x="10637215" y="0"/>
-            <a:ext cx="914400" cy="1554480"/>
-          </a:xfrm>
-          <a:prstGeom prst="round2SameRect">
+          <a:xfrm>
+            <a:off x="640080" y="566928"/>
+            <a:ext cx="64008" cy="868680"/>
+          </a:xfrm>
+          <a:prstGeom prst="roundRect">
             <a:avLst>
-              <a:gd name="adj1" fmla="val 50000"/>
-              <a:gd name="adj2" fmla="val 0"/>
+              <a:gd name="adj" fmla="val 50000"/>
             </a:avLst>
           </a:prstGeom>
           <a:solidFill>
-            <a:srgbClr val="F5D4CC"/>
+            <a:srgbClr val="D88C79"/>
           </a:solidFill>
           <a:ln>
             <a:noFill/>
@@ -3906,6 +4065,73 @@
       </p:sp>
       <p:sp>
         <p:nvSpPr>
+          <p:cNvPr id="4" name="상단 라벨"/>
+          <p:cNvSpPr txBox="1"/>
+          <p:nvPr/>
+        </p:nvSpPr>
+        <p:spPr>
+          <a:xfrm>
+            <a:off x="868680" y="274320"/>
+            <a:ext cx="5486400" cy="274320"/>
+          </a:xfrm>
+          <a:prstGeom prst="rect">
+            <a:avLst/>
+          </a:prstGeom>
+          <a:noFill/>
+        </p:spPr>
+        <p:txBody>
+          <a:bodyPr wrap="square" lIns="54864" rIns="54864" tIns="27432" bIns="27432" anchor="ctr">
+            <a:noAutofit/>
+          </a:bodyPr>
+          <a:lstStyle/>
+          <a:p>
+            <a:pPr algn="l">
+              <a:lnSpc>
+                <a:spcPct val="115000"/>
+              </a:lnSpc>
+            </a:pPr>
+            <a:r>
+              <a:rPr sz="900" b="1" i="0" spc="250">
+                <a:solidFill>
+                  <a:srgbClr val="8E8780"/>
+                </a:solidFill>
+              </a:rPr>
+              <a:t>WEDDING</a:t>
+            </a:r>
+          </a:p>
+        </p:txBody>
+      </p:sp>
+      <p:sp>
+        <p:nvSpPr>
+          <p:cNvPr id="5" name="포인트"/>
+          <p:cNvSpPr/>
+          <p:nvPr/>
+        </p:nvSpPr>
+        <p:spPr>
+          <a:xfrm rot="18900000">
+            <a:off x="11167567" y="667512"/>
+            <a:ext cx="310896" cy="310896"/>
+          </a:xfrm>
+          <a:prstGeom prst="teardrop">
+            <a:avLst/>
+          </a:prstGeom>
+          <a:solidFill>
+            <a:srgbClr val="EBBAAD"/>
+          </a:solidFill>
+          <a:ln>
+            <a:noFill/>
+          </a:ln>
+        </p:spPr>
+        <p:txBody>
+          <a:bodyPr rtlCol="0" anchor="ctr"/>
+          <a:lstStyle/>
+          <a:p>
+            <a:pPr algn="ctr"/>
+          </a:p>
+        </p:txBody>
+      </p:sp>
+      <p:sp>
+        <p:nvSpPr>
           <p:cNvPr id="2" name="Title 1"/>
           <p:cNvSpPr>
             <a:spLocks noGrp="1"/>
@@ -3916,8 +4142,8 @@
         </p:nvSpPr>
         <p:spPr>
           <a:xfrm>
-            <a:off x="640080" y="457200"/>
-            <a:ext cx="9722815" cy="868680"/>
+            <a:off x="868680" y="566928"/>
+            <a:ext cx="9448495" cy="868680"/>
           </a:xfrm>
         </p:spPr>
         <p:txBody>
@@ -3934,7 +4160,7 @@
             <a:r>
               <a:rPr sz="3000" b="1" i="0">
                 <a:solidFill>
-                  <a:srgbClr val="5B2315"/>
+                  <a:srgbClr val="26231F"/>
                 </a:solidFill>
               </a:rPr>
               <a:t>감사의 말씀</a:t>
@@ -3944,26 +4170,24 @@
       </p:sp>
       <p:sp>
         <p:nvSpPr>
-          <p:cNvPr id="4" name="감사 글 칸"/>
+          <p:cNvPr id="6" name="감사 글 칸"/>
           <p:cNvSpPr/>
           <p:nvPr/>
         </p:nvSpPr>
         <p:spPr>
           <a:xfrm>
-            <a:off x="640080" y="1600200"/>
-            <a:ext cx="10911535" cy="4800600"/>
+            <a:off x="640080" y="1783080"/>
+            <a:ext cx="10911535" cy="4572000"/>
           </a:xfrm>
           <a:prstGeom prst="roundRect">
             <a:avLst>
-              <a:gd name="adj" fmla="val 8000"/>
+              <a:gd name="adj" fmla="val 7000"/>
             </a:avLst>
           </a:prstGeom>
-          <a:solidFill>
-            <a:srgbClr val="FBF1EE"/>
-          </a:solidFill>
-          <a:ln w="12700">
+          <a:noFill/>
+          <a:ln w="15875">
             <a:solidFill>
-              <a:srgbClr val="F5D4CC"/>
+              <a:srgbClr val="D88C79"/>
             </a:solidFill>
           </a:ln>
         </p:spPr>
@@ -3977,14 +4201,14 @@
       </p:sp>
       <p:sp>
         <p:nvSpPr>
-          <p:cNvPr id="5" name="감사 글"/>
+          <p:cNvPr id="7" name="감사 글"/>
           <p:cNvSpPr txBox="1"/>
           <p:nvPr/>
         </p:nvSpPr>
         <p:spPr>
           <a:xfrm>
-            <a:off x="1097280" y="1965960"/>
-            <a:ext cx="9997135" cy="4069080"/>
+            <a:off x="1097280" y="2148840"/>
+            <a:ext cx="9997135" cy="3840480"/>
           </a:xfrm>
           <a:prstGeom prst="rect">
             <a:avLst/>
@@ -4005,7 +4229,7 @@
             <a:r>
               <a:rPr sz="2000" b="0" i="0">
                 <a:solidFill>
-                  <a:srgbClr val="2B2B2B"/>
+                  <a:srgbClr val="26231F"/>
                 </a:solidFill>
               </a:rPr>
               <a:t>바쁘신 중에 와 주셔서 고맙습니다.</a:t>
@@ -4020,7 +4244,7 @@
             <a:r>
               <a:rPr sz="2000" b="0" i="0">
                 <a:solidFill>
-                  <a:srgbClr val="2B2B2B"/>
+                  <a:srgbClr val="26231F"/>
                 </a:solidFill>
               </a:rPr>
               <a:t/>
@@ -4035,7 +4259,7 @@
             <a:r>
               <a:rPr sz="2000" b="0" i="0">
                 <a:solidFill>
-                  <a:srgbClr val="2B2B2B"/>
+                  <a:srgbClr val="26231F"/>
                 </a:solidFill>
               </a:rPr>
               <a:t>보내 주신 마음 잊지 않고</a:t>
@@ -4050,7 +4274,7 @@
             <a:r>
               <a:rPr sz="2000" b="0" i="0">
                 <a:solidFill>
-                  <a:srgbClr val="2B2B2B"/>
+                  <a:srgbClr val="26231F"/>
                 </a:solidFill>
               </a:rPr>
               <a:t>잘 살겠습니다.</a:t>
@@ -4065,7 +4289,7 @@
             <a:r>
               <a:rPr sz="2000" b="0" i="0">
                 <a:solidFill>
-                  <a:srgbClr val="2B2B2B"/>
+                  <a:srgbClr val="26231F"/>
                 </a:solidFill>
               </a:rPr>
               <a:t/>
@@ -4080,7 +4304,7 @@
             <a:r>
               <a:rPr sz="2000" b="0" i="0">
                 <a:solidFill>
-                  <a:srgbClr val="2B2B2B"/>
+                  <a:srgbClr val="26231F"/>
                 </a:solidFill>
               </a:rPr>
               <a:t>신랑 · 신부 드림</a:t>
@@ -4102,7 +4326,7 @@
     <p:bg>
       <p:bgPr>
         <a:solidFill>
-          <a:srgbClr val="FBF1EE"/>
+          <a:srgbClr val="FBEFEC"/>
         </a:solidFill>
         <a:effectLst/>
       </p:bgPr>
@@ -4121,18 +4345,17 @@
           <p:nvPr/>
         </p:nvSpPr>
         <p:spPr>
-          <a:xfrm rot="10800000">
-            <a:off x="10637215" y="0"/>
-            <a:ext cx="914400" cy="1554480"/>
-          </a:xfrm>
-          <a:prstGeom prst="round2SameRect">
+          <a:xfrm>
+            <a:off x="640080" y="566928"/>
+            <a:ext cx="64008" cy="868680"/>
+          </a:xfrm>
+          <a:prstGeom prst="roundRect">
             <a:avLst>
-              <a:gd name="adj1" fmla="val 50000"/>
-              <a:gd name="adj2" fmla="val 0"/>
+              <a:gd name="adj" fmla="val 50000"/>
             </a:avLst>
           </a:prstGeom>
           <a:solidFill>
-            <a:srgbClr val="F5D4CC"/>
+            <a:srgbClr val="D88C79"/>
           </a:solidFill>
           <a:ln>
             <a:noFill/>
@@ -4148,6 +4371,73 @@
       </p:sp>
       <p:sp>
         <p:nvSpPr>
+          <p:cNvPr id="4" name="상단 라벨"/>
+          <p:cNvSpPr txBox="1"/>
+          <p:nvPr/>
+        </p:nvSpPr>
+        <p:spPr>
+          <a:xfrm>
+            <a:off x="868680" y="274320"/>
+            <a:ext cx="5486400" cy="274320"/>
+          </a:xfrm>
+          <a:prstGeom prst="rect">
+            <a:avLst/>
+          </a:prstGeom>
+          <a:noFill/>
+        </p:spPr>
+        <p:txBody>
+          <a:bodyPr wrap="square" lIns="54864" rIns="54864" tIns="27432" bIns="27432" anchor="ctr">
+            <a:noAutofit/>
+          </a:bodyPr>
+          <a:lstStyle/>
+          <a:p>
+            <a:pPr algn="l">
+              <a:lnSpc>
+                <a:spcPct val="115000"/>
+              </a:lnSpc>
+            </a:pPr>
+            <a:r>
+              <a:rPr sz="900" b="1" i="0" spc="250">
+                <a:solidFill>
+                  <a:srgbClr val="8E8780"/>
+                </a:solidFill>
+              </a:rPr>
+              <a:t>WEDDING</a:t>
+            </a:r>
+          </a:p>
+        </p:txBody>
+      </p:sp>
+      <p:sp>
+        <p:nvSpPr>
+          <p:cNvPr id="5" name="포인트"/>
+          <p:cNvSpPr/>
+          <p:nvPr/>
+        </p:nvSpPr>
+        <p:spPr>
+          <a:xfrm rot="18900000">
+            <a:off x="11167567" y="667512"/>
+            <a:ext cx="310896" cy="310896"/>
+          </a:xfrm>
+          <a:prstGeom prst="teardrop">
+            <a:avLst/>
+          </a:prstGeom>
+          <a:solidFill>
+            <a:srgbClr val="EBBAAD"/>
+          </a:solidFill>
+          <a:ln>
+            <a:noFill/>
+          </a:ln>
+        </p:spPr>
+        <p:txBody>
+          <a:bodyPr rtlCol="0" anchor="ctr"/>
+          <a:lstStyle/>
+          <a:p>
+            <a:pPr algn="ctr"/>
+          </a:p>
+        </p:txBody>
+      </p:sp>
+      <p:sp>
+        <p:nvSpPr>
           <p:cNvPr id="2" name="Title 1"/>
           <p:cNvSpPr>
             <a:spLocks noGrp="1"/>
@@ -4158,8 +4448,8 @@
         </p:nvSpPr>
         <p:spPr>
           <a:xfrm>
-            <a:off x="640080" y="457200"/>
-            <a:ext cx="9722815" cy="868680"/>
+            <a:off x="868680" y="566928"/>
+            <a:ext cx="9448495" cy="868680"/>
           </a:xfrm>
         </p:spPr>
         <p:txBody>
@@ -4176,7 +4466,7 @@
             <a:r>
               <a:rPr sz="3000" b="1" i="0">
                 <a:solidFill>
-                  <a:srgbClr val="5B2315"/>
+                  <a:srgbClr val="26231F"/>
                 </a:solidFill>
               </a:rPr>
               <a:t>답례 안내</a:t>
@@ -4186,26 +4476,24 @@
       </p:sp>
       <p:sp>
         <p:nvSpPr>
-          <p:cNvPr id="4" name="카드 1"/>
+          <p:cNvPr id="6" name="카드 1"/>
           <p:cNvSpPr/>
           <p:nvPr/>
         </p:nvSpPr>
         <p:spPr>
           <a:xfrm>
-            <a:off x="640080" y="1600200"/>
-            <a:ext cx="3484778" cy="4800600"/>
+            <a:off x="640080" y="1783080"/>
+            <a:ext cx="3484778" cy="4572000"/>
           </a:xfrm>
           <a:prstGeom prst="roundRect">
             <a:avLst>
-              <a:gd name="adj" fmla="val 8000"/>
+              <a:gd name="adj" fmla="val 7000"/>
             </a:avLst>
           </a:prstGeom>
-          <a:solidFill>
-            <a:srgbClr val="FBF1EE"/>
-          </a:solidFill>
+          <a:noFill/>
           <a:ln w="15875">
             <a:solidFill>
-              <a:srgbClr val="F5D4CC"/>
+              <a:srgbClr val="D88C79"/>
             </a:solidFill>
           </a:ln>
         </p:spPr>
@@ -4219,23 +4507,23 @@
       </p:sp>
       <p:sp>
         <p:nvSpPr>
-          <p:cNvPr id="5" name="번호 1"/>
+          <p:cNvPr id="7" name="번호 1"/>
           <p:cNvSpPr/>
           <p:nvPr/>
         </p:nvSpPr>
         <p:spPr>
           <a:xfrm>
-            <a:off x="822959" y="1783080"/>
+            <a:off x="822959" y="1965960"/>
             <a:ext cx="457200" cy="457200"/>
           </a:xfrm>
           <a:prstGeom prst="ellipse">
             <a:avLst/>
           </a:prstGeom>
-          <a:solidFill>
-            <a:srgbClr val="AE4329"/>
-          </a:solidFill>
-          <a:ln>
-            <a:noFill/>
+          <a:noFill/>
+          <a:ln w="19050">
+            <a:solidFill>
+              <a:srgbClr val="D88C79"/>
+            </a:solidFill>
           </a:ln>
         </p:spPr>
         <p:txBody>
@@ -4252,7 +4540,7 @@
             <a:r>
               <a:rPr sz="1600" b="1" i="0">
                 <a:solidFill>
-                  <a:srgbClr val="FFFFFF"/>
+                  <a:srgbClr val="492E27"/>
                 </a:solidFill>
               </a:rPr>
               <a:t>1</a:t>
@@ -4262,13 +4550,13 @@
       </p:sp>
       <p:sp>
         <p:nvSpPr>
-          <p:cNvPr id="6" name="TextBox 5"/>
+          <p:cNvPr id="8" name="TextBox 7"/>
           <p:cNvSpPr txBox="1"/>
           <p:nvPr/>
         </p:nvSpPr>
         <p:spPr>
           <a:xfrm>
-            <a:off x="777240" y="2377440"/>
+            <a:off x="777240" y="2560320"/>
             <a:ext cx="3210458" cy="640080"/>
           </a:xfrm>
           <a:prstGeom prst="rect">
@@ -4290,7 +4578,7 @@
             <a:r>
               <a:rPr sz="1800" b="1" i="0">
                 <a:solidFill>
-                  <a:srgbClr val="5B2315"/>
+                  <a:srgbClr val="492E27"/>
                 </a:solidFill>
               </a:rPr>
               <a:t>답례품</a:t>
@@ -4300,14 +4588,14 @@
       </p:sp>
       <p:sp>
         <p:nvSpPr>
-          <p:cNvPr id="7" name="TextBox 6"/>
+          <p:cNvPr id="9" name="TextBox 8"/>
           <p:cNvSpPr txBox="1"/>
           <p:nvPr/>
         </p:nvSpPr>
         <p:spPr>
           <a:xfrm>
-            <a:off x="777240" y="3063240"/>
-            <a:ext cx="3210458" cy="3200400"/>
+            <a:off x="777240" y="3246120"/>
+            <a:ext cx="3210458" cy="2971800"/>
           </a:xfrm>
           <a:prstGeom prst="rect">
             <a:avLst/>
@@ -4328,7 +4616,7 @@
             <a:r>
               <a:rPr sz="1500" b="0" i="0">
                 <a:solidFill>
-                  <a:srgbClr val="2B2B2B"/>
+                  <a:srgbClr val="26231F"/>
                 </a:solidFill>
               </a:rPr>
               <a:t>입력하세요</a:t>
@@ -4338,26 +4626,24 @@
       </p:sp>
       <p:sp>
         <p:nvSpPr>
-          <p:cNvPr id="8" name="카드 2"/>
+          <p:cNvPr id="10" name="카드 2"/>
           <p:cNvSpPr/>
           <p:nvPr/>
         </p:nvSpPr>
         <p:spPr>
           <a:xfrm>
-            <a:off x="4353458" y="1600200"/>
-            <a:ext cx="3484778" cy="4800600"/>
+            <a:off x="4353458" y="1783080"/>
+            <a:ext cx="3484778" cy="4572000"/>
           </a:xfrm>
           <a:prstGeom prst="roundRect">
             <a:avLst>
-              <a:gd name="adj" fmla="val 8000"/>
+              <a:gd name="adj" fmla="val 7000"/>
             </a:avLst>
           </a:prstGeom>
-          <a:solidFill>
-            <a:srgbClr val="FBF1EE"/>
-          </a:solidFill>
+          <a:noFill/>
           <a:ln w="15875">
             <a:solidFill>
-              <a:srgbClr val="F5D4CC"/>
+              <a:srgbClr val="D88C79"/>
             </a:solidFill>
           </a:ln>
         </p:spPr>
@@ -4371,23 +4657,23 @@
       </p:sp>
       <p:sp>
         <p:nvSpPr>
-          <p:cNvPr id="9" name="번호 2"/>
+          <p:cNvPr id="11" name="번호 2"/>
           <p:cNvSpPr/>
           <p:nvPr/>
         </p:nvSpPr>
         <p:spPr>
           <a:xfrm>
-            <a:off x="4536338" y="1783080"/>
+            <a:off x="4536338" y="1965960"/>
             <a:ext cx="457200" cy="457200"/>
           </a:xfrm>
           <a:prstGeom prst="ellipse">
             <a:avLst/>
           </a:prstGeom>
-          <a:solidFill>
-            <a:srgbClr val="AE4329"/>
-          </a:solidFill>
-          <a:ln>
-            <a:noFill/>
+          <a:noFill/>
+          <a:ln w="19050">
+            <a:solidFill>
+              <a:srgbClr val="D88C79"/>
+            </a:solidFill>
           </a:ln>
         </p:spPr>
         <p:txBody>
@@ -4404,7 +4690,7 @@
             <a:r>
               <a:rPr sz="1600" b="1" i="0">
                 <a:solidFill>
-                  <a:srgbClr val="FFFFFF"/>
+                  <a:srgbClr val="492E27"/>
                 </a:solidFill>
               </a:rPr>
               <a:t>2</a:t>
@@ -4414,13 +4700,13 @@
       </p:sp>
       <p:sp>
         <p:nvSpPr>
-          <p:cNvPr id="10" name="TextBox 9"/>
+          <p:cNvPr id="12" name="TextBox 11"/>
           <p:cNvSpPr txBox="1"/>
           <p:nvPr/>
         </p:nvSpPr>
         <p:spPr>
           <a:xfrm>
-            <a:off x="4490618" y="2377440"/>
+            <a:off x="4490618" y="2560320"/>
             <a:ext cx="3210458" cy="640080"/>
           </a:xfrm>
           <a:prstGeom prst="rect">
@@ -4442,7 +4728,7 @@
             <a:r>
               <a:rPr sz="1800" b="1" i="0">
                 <a:solidFill>
-                  <a:srgbClr val="5B2315"/>
+                  <a:srgbClr val="492E27"/>
                 </a:solidFill>
               </a:rPr>
               <a:t>방명록</a:t>
@@ -4452,14 +4738,14 @@
       </p:sp>
       <p:sp>
         <p:nvSpPr>
-          <p:cNvPr id="11" name="TextBox 10"/>
+          <p:cNvPr id="13" name="TextBox 12"/>
           <p:cNvSpPr txBox="1"/>
           <p:nvPr/>
         </p:nvSpPr>
         <p:spPr>
           <a:xfrm>
-            <a:off x="4490618" y="3063240"/>
-            <a:ext cx="3210458" cy="3200400"/>
+            <a:off x="4490618" y="3246120"/>
+            <a:ext cx="3210458" cy="2971800"/>
           </a:xfrm>
           <a:prstGeom prst="rect">
             <a:avLst/>
@@ -4480,7 +4766,7 @@
             <a:r>
               <a:rPr sz="1500" b="0" i="0">
                 <a:solidFill>
-                  <a:srgbClr val="2B2B2B"/>
+                  <a:srgbClr val="26231F"/>
                 </a:solidFill>
               </a:rPr>
               <a:t>입력하세요</a:t>
@@ -4490,26 +4776,24 @@
       </p:sp>
       <p:sp>
         <p:nvSpPr>
-          <p:cNvPr id="12" name="카드 3"/>
+          <p:cNvPr id="14" name="카드 3"/>
           <p:cNvSpPr/>
           <p:nvPr/>
         </p:nvSpPr>
         <p:spPr>
           <a:xfrm>
-            <a:off x="8066836" y="1600200"/>
-            <a:ext cx="3484778" cy="4800600"/>
+            <a:off x="8066836" y="1783080"/>
+            <a:ext cx="3484778" cy="4572000"/>
           </a:xfrm>
           <a:prstGeom prst="roundRect">
             <a:avLst>
-              <a:gd name="adj" fmla="val 8000"/>
+              <a:gd name="adj" fmla="val 7000"/>
             </a:avLst>
           </a:prstGeom>
-          <a:solidFill>
-            <a:srgbClr val="FBF1EE"/>
-          </a:solidFill>
+          <a:noFill/>
           <a:ln w="15875">
             <a:solidFill>
-              <a:srgbClr val="F5D4CC"/>
+              <a:srgbClr val="D88C79"/>
             </a:solidFill>
           </a:ln>
         </p:spPr>
@@ -4523,23 +4807,23 @@
       </p:sp>
       <p:sp>
         <p:nvSpPr>
-          <p:cNvPr id="13" name="번호 3"/>
+          <p:cNvPr id="15" name="번호 3"/>
           <p:cNvSpPr/>
           <p:nvPr/>
         </p:nvSpPr>
         <p:spPr>
           <a:xfrm>
-            <a:off x="8249716" y="1783080"/>
+            <a:off x="8249716" y="1965960"/>
             <a:ext cx="457200" cy="457200"/>
           </a:xfrm>
           <a:prstGeom prst="ellipse">
             <a:avLst/>
           </a:prstGeom>
-          <a:solidFill>
-            <a:srgbClr val="AE4329"/>
-          </a:solidFill>
-          <a:ln>
-            <a:noFill/>
+          <a:noFill/>
+          <a:ln w="19050">
+            <a:solidFill>
+              <a:srgbClr val="D88C79"/>
+            </a:solidFill>
           </a:ln>
         </p:spPr>
         <p:txBody>
@@ -4556,7 +4840,7 @@
             <a:r>
               <a:rPr sz="1600" b="1" i="0">
                 <a:solidFill>
-                  <a:srgbClr val="FFFFFF"/>
+                  <a:srgbClr val="492E27"/>
                 </a:solidFill>
               </a:rPr>
               <a:t>3</a:t>
@@ -4566,13 +4850,13 @@
       </p:sp>
       <p:sp>
         <p:nvSpPr>
-          <p:cNvPr id="14" name="TextBox 13"/>
+          <p:cNvPr id="16" name="TextBox 15"/>
           <p:cNvSpPr txBox="1"/>
           <p:nvPr/>
         </p:nvSpPr>
         <p:spPr>
           <a:xfrm>
-            <a:off x="8203996" y="2377440"/>
+            <a:off x="8203996" y="2560320"/>
             <a:ext cx="3210458" cy="640080"/>
           </a:xfrm>
           <a:prstGeom prst="rect">
@@ -4594,7 +4878,7 @@
             <a:r>
               <a:rPr sz="1800" b="1" i="0">
                 <a:solidFill>
-                  <a:srgbClr val="5B2315"/>
+                  <a:srgbClr val="492E27"/>
                 </a:solidFill>
               </a:rPr>
               <a:t>사진 · 영상</a:t>
@@ -4604,14 +4888,14 @@
       </p:sp>
       <p:sp>
         <p:nvSpPr>
-          <p:cNvPr id="15" name="TextBox 14"/>
+          <p:cNvPr id="17" name="TextBox 16"/>
           <p:cNvSpPr txBox="1"/>
           <p:nvPr/>
         </p:nvSpPr>
         <p:spPr>
           <a:xfrm>
-            <a:off x="8203996" y="3063240"/>
-            <a:ext cx="3210458" cy="3200400"/>
+            <a:off x="8203996" y="3246120"/>
+            <a:ext cx="3210458" cy="2971800"/>
           </a:xfrm>
           <a:prstGeom prst="rect">
             <a:avLst/>
@@ -4632,7 +4916,7 @@
             <a:r>
               <a:rPr sz="1500" b="0" i="0">
                 <a:solidFill>
-                  <a:srgbClr val="2B2B2B"/>
+                  <a:srgbClr val="26231F"/>
                 </a:solidFill>
               </a:rPr>
               <a:t>입력하세요</a:t>
@@ -4654,7 +4938,7 @@
     <p:bg>
       <p:bgPr>
         <a:solidFill>
-          <a:srgbClr val="FBF1EE"/>
+          <a:srgbClr val="FBEFEC"/>
         </a:solidFill>
         <a:effectLst/>
       </p:bgPr>
@@ -4673,18 +4957,17 @@
           <p:nvPr/>
         </p:nvSpPr>
         <p:spPr>
-          <a:xfrm rot="10800000">
-            <a:off x="10637215" y="0"/>
-            <a:ext cx="914400" cy="1554480"/>
-          </a:xfrm>
-          <a:prstGeom prst="round2SameRect">
+          <a:xfrm>
+            <a:off x="640080" y="566928"/>
+            <a:ext cx="64008" cy="868680"/>
+          </a:xfrm>
+          <a:prstGeom prst="roundRect">
             <a:avLst>
-              <a:gd name="adj1" fmla="val 50000"/>
-              <a:gd name="adj2" fmla="val 0"/>
+              <a:gd name="adj" fmla="val 50000"/>
             </a:avLst>
           </a:prstGeom>
           <a:solidFill>
-            <a:srgbClr val="F5D4CC"/>
+            <a:srgbClr val="D88C79"/>
           </a:solidFill>
           <a:ln>
             <a:noFill/>
@@ -4700,6 +4983,73 @@
       </p:sp>
       <p:sp>
         <p:nvSpPr>
+          <p:cNvPr id="4" name="상단 라벨"/>
+          <p:cNvSpPr txBox="1"/>
+          <p:nvPr/>
+        </p:nvSpPr>
+        <p:spPr>
+          <a:xfrm>
+            <a:off x="868680" y="274320"/>
+            <a:ext cx="5486400" cy="274320"/>
+          </a:xfrm>
+          <a:prstGeom prst="rect">
+            <a:avLst/>
+          </a:prstGeom>
+          <a:noFill/>
+        </p:spPr>
+        <p:txBody>
+          <a:bodyPr wrap="square" lIns="54864" rIns="54864" tIns="27432" bIns="27432" anchor="ctr">
+            <a:noAutofit/>
+          </a:bodyPr>
+          <a:lstStyle/>
+          <a:p>
+            <a:pPr algn="l">
+              <a:lnSpc>
+                <a:spcPct val="115000"/>
+              </a:lnSpc>
+            </a:pPr>
+            <a:r>
+              <a:rPr sz="900" b="1" i="0" spc="250">
+                <a:solidFill>
+                  <a:srgbClr val="8E8780"/>
+                </a:solidFill>
+              </a:rPr>
+              <a:t>WEDDING</a:t>
+            </a:r>
+          </a:p>
+        </p:txBody>
+      </p:sp>
+      <p:sp>
+        <p:nvSpPr>
+          <p:cNvPr id="5" name="포인트"/>
+          <p:cNvSpPr/>
+          <p:nvPr/>
+        </p:nvSpPr>
+        <p:spPr>
+          <a:xfrm rot="18900000">
+            <a:off x="11167567" y="667512"/>
+            <a:ext cx="310896" cy="310896"/>
+          </a:xfrm>
+          <a:prstGeom prst="teardrop">
+            <a:avLst/>
+          </a:prstGeom>
+          <a:solidFill>
+            <a:srgbClr val="EBBAAD"/>
+          </a:solidFill>
+          <a:ln>
+            <a:noFill/>
+          </a:ln>
+        </p:spPr>
+        <p:txBody>
+          <a:bodyPr rtlCol="0" anchor="ctr"/>
+          <a:lstStyle/>
+          <a:p>
+            <a:pPr algn="ctr"/>
+          </a:p>
+        </p:txBody>
+      </p:sp>
+      <p:sp>
+        <p:nvSpPr>
           <p:cNvPr id="2" name="Title 1"/>
           <p:cNvSpPr>
             <a:spLocks noGrp="1"/>
@@ -4710,8 +5060,8 @@
         </p:nvSpPr>
         <p:spPr>
           <a:xfrm>
-            <a:off x="640080" y="457200"/>
-            <a:ext cx="9722815" cy="868680"/>
+            <a:off x="868680" y="566928"/>
+            <a:ext cx="9448495" cy="868680"/>
           </a:xfrm>
         </p:spPr>
         <p:txBody>
@@ -4728,7 +5078,7 @@
             <a:r>
               <a:rPr sz="3000" b="1" i="0">
                 <a:solidFill>
-                  <a:srgbClr val="5B2315"/>
+                  <a:srgbClr val="26231F"/>
                 </a:solidFill>
               </a:rPr>
               <a:t>웨딩 사진</a:t>
@@ -4738,14 +5088,14 @@
       </p:sp>
       <p:sp>
         <p:nvSpPr>
-          <p:cNvPr id="4" name="사진 자리"/>
+          <p:cNvPr id="6" name="사진 자리"/>
           <p:cNvSpPr/>
           <p:nvPr/>
         </p:nvSpPr>
         <p:spPr>
           <a:xfrm>
-            <a:off x="640080" y="1600200"/>
-            <a:ext cx="3515258" cy="2308860"/>
+            <a:off x="640080" y="1783080"/>
+            <a:ext cx="3515258" cy="2194560"/>
           </a:xfrm>
           <a:prstGeom prst="roundRect">
             <a:avLst>
@@ -4753,12 +5103,10 @@
             </a:avLst>
           </a:prstGeom>
           <a:solidFill>
-            <a:srgbClr val="F5D4CC"/>
+            <a:srgbClr val="F6DCD5"/>
           </a:solidFill>
           <a:ln w="19050">
-            <a:solidFill>
-              <a:srgbClr val="AE4329"/>
-            </a:solidFill>
+            <a:noFill/>
             <a:prstDash val="dash"/>
           </a:ln>
         </p:spPr>
@@ -4776,7 +5124,7 @@
             <a:r>
               <a:rPr sz="1200" b="0" i="0">
                 <a:solidFill>
-                  <a:srgbClr val="5B2315"/>
+                  <a:srgbClr val="8E8780"/>
                 </a:solidFill>
               </a:rPr>
               <a:t>사진 1</a:t>
@@ -4786,14 +5134,14 @@
       </p:sp>
       <p:sp>
         <p:nvSpPr>
-          <p:cNvPr id="5" name="사진 자리"/>
+          <p:cNvPr id="7" name="사진 자리"/>
           <p:cNvSpPr/>
           <p:nvPr/>
         </p:nvSpPr>
         <p:spPr>
           <a:xfrm>
-            <a:off x="4338218" y="1600200"/>
-            <a:ext cx="3515258" cy="2308860"/>
+            <a:off x="4338218" y="1783080"/>
+            <a:ext cx="3515258" cy="2194560"/>
           </a:xfrm>
           <a:prstGeom prst="roundRect">
             <a:avLst>
@@ -4801,12 +5149,10 @@
             </a:avLst>
           </a:prstGeom>
           <a:solidFill>
-            <a:srgbClr val="F5D4CC"/>
+            <a:srgbClr val="F6DCD5"/>
           </a:solidFill>
           <a:ln w="19050">
-            <a:solidFill>
-              <a:srgbClr val="AE4329"/>
-            </a:solidFill>
+            <a:noFill/>
             <a:prstDash val="dash"/>
           </a:ln>
         </p:spPr>
@@ -4824,7 +5170,7 @@
             <a:r>
               <a:rPr sz="1200" b="0" i="0">
                 <a:solidFill>
-                  <a:srgbClr val="5B2315"/>
+                  <a:srgbClr val="8E8780"/>
                 </a:solidFill>
               </a:rPr>
               <a:t>사진 2</a:t>
@@ -4834,14 +5180,14 @@
       </p:sp>
       <p:sp>
         <p:nvSpPr>
-          <p:cNvPr id="6" name="사진 자리"/>
+          <p:cNvPr id="8" name="사진 자리"/>
           <p:cNvSpPr/>
           <p:nvPr/>
         </p:nvSpPr>
         <p:spPr>
           <a:xfrm>
-            <a:off x="8036356" y="1600200"/>
-            <a:ext cx="3515258" cy="2308860"/>
+            <a:off x="8036356" y="1783080"/>
+            <a:ext cx="3515258" cy="2194560"/>
           </a:xfrm>
           <a:prstGeom prst="roundRect">
             <a:avLst>
@@ -4849,12 +5195,10 @@
             </a:avLst>
           </a:prstGeom>
           <a:solidFill>
-            <a:srgbClr val="F5D4CC"/>
+            <a:srgbClr val="F6DCD5"/>
           </a:solidFill>
           <a:ln w="19050">
-            <a:solidFill>
-              <a:srgbClr val="AE4329"/>
-            </a:solidFill>
+            <a:noFill/>
             <a:prstDash val="dash"/>
           </a:ln>
         </p:spPr>
@@ -4872,7 +5216,7 @@
             <a:r>
               <a:rPr sz="1200" b="0" i="0">
                 <a:solidFill>
-                  <a:srgbClr val="5B2315"/>
+                  <a:srgbClr val="8E8780"/>
                 </a:solidFill>
               </a:rPr>
               <a:t>사진 3</a:t>
@@ -4882,14 +5226,14 @@
       </p:sp>
       <p:sp>
         <p:nvSpPr>
-          <p:cNvPr id="7" name="사진 자리"/>
+          <p:cNvPr id="9" name="사진 자리"/>
           <p:cNvSpPr/>
           <p:nvPr/>
         </p:nvSpPr>
         <p:spPr>
           <a:xfrm>
-            <a:off x="640080" y="4091939"/>
-            <a:ext cx="3515258" cy="2308860"/>
+            <a:off x="640080" y="4160520"/>
+            <a:ext cx="3515258" cy="2194560"/>
           </a:xfrm>
           <a:prstGeom prst="roundRect">
             <a:avLst>
@@ -4897,12 +5241,10 @@
             </a:avLst>
           </a:prstGeom>
           <a:solidFill>
-            <a:srgbClr val="F5D4CC"/>
+            <a:srgbClr val="F6DCD5"/>
           </a:solidFill>
           <a:ln w="19050">
-            <a:solidFill>
-              <a:srgbClr val="AE4329"/>
-            </a:solidFill>
+            <a:noFill/>
             <a:prstDash val="dash"/>
           </a:ln>
         </p:spPr>
@@ -4920,7 +5262,7 @@
             <a:r>
               <a:rPr sz="1200" b="0" i="0">
                 <a:solidFill>
-                  <a:srgbClr val="5B2315"/>
+                  <a:srgbClr val="8E8780"/>
                 </a:solidFill>
               </a:rPr>
               <a:t>사진 4</a:t>
@@ -4930,14 +5272,14 @@
       </p:sp>
       <p:sp>
         <p:nvSpPr>
-          <p:cNvPr id="8" name="사진 자리"/>
+          <p:cNvPr id="10" name="사진 자리"/>
           <p:cNvSpPr/>
           <p:nvPr/>
         </p:nvSpPr>
         <p:spPr>
           <a:xfrm>
-            <a:off x="4338218" y="4091939"/>
-            <a:ext cx="3515258" cy="2308860"/>
+            <a:off x="4338218" y="4160520"/>
+            <a:ext cx="3515258" cy="2194560"/>
           </a:xfrm>
           <a:prstGeom prst="roundRect">
             <a:avLst>
@@ -4945,12 +5287,10 @@
             </a:avLst>
           </a:prstGeom>
           <a:solidFill>
-            <a:srgbClr val="F5D4CC"/>
+            <a:srgbClr val="F6DCD5"/>
           </a:solidFill>
           <a:ln w="19050">
-            <a:solidFill>
-              <a:srgbClr val="AE4329"/>
-            </a:solidFill>
+            <a:noFill/>
             <a:prstDash val="dash"/>
           </a:ln>
         </p:spPr>
@@ -4968,7 +5308,7 @@
             <a:r>
               <a:rPr sz="1200" b="0" i="0">
                 <a:solidFill>
-                  <a:srgbClr val="5B2315"/>
+                  <a:srgbClr val="8E8780"/>
                 </a:solidFill>
               </a:rPr>
               <a:t>사진 5</a:t>
@@ -4978,14 +5318,14 @@
       </p:sp>
       <p:sp>
         <p:nvSpPr>
-          <p:cNvPr id="9" name="사진 자리"/>
+          <p:cNvPr id="11" name="사진 자리"/>
           <p:cNvSpPr/>
           <p:nvPr/>
         </p:nvSpPr>
         <p:spPr>
           <a:xfrm>
-            <a:off x="8036356" y="4091939"/>
-            <a:ext cx="3515258" cy="2308860"/>
+            <a:off x="8036356" y="4160520"/>
+            <a:ext cx="3515258" cy="2194560"/>
           </a:xfrm>
           <a:prstGeom prst="roundRect">
             <a:avLst>
@@ -4993,12 +5333,10 @@
             </a:avLst>
           </a:prstGeom>
           <a:solidFill>
-            <a:srgbClr val="F5D4CC"/>
+            <a:srgbClr val="F6DCD5"/>
           </a:solidFill>
           <a:ln w="19050">
-            <a:solidFill>
-              <a:srgbClr val="AE4329"/>
-            </a:solidFill>
+            <a:noFill/>
             <a:prstDash val="dash"/>
           </a:ln>
         </p:spPr>
@@ -5016,7 +5354,7 @@
             <a:r>
               <a:rPr sz="1200" b="0" i="0">
                 <a:solidFill>
-                  <a:srgbClr val="5B2315"/>
+                  <a:srgbClr val="8E8780"/>
                 </a:solidFill>
               </a:rPr>
               <a:t>사진 6</a:t>
@@ -5035,6 +5373,14 @@
 <file path=ppt/slides/slide6.xml><?xml version="1.0" encoding="utf-8"?>
 <p:sld xmlns:a="http://schemas.openxmlformats.org/drawingml/2006/main" xmlns:p="http://schemas.openxmlformats.org/presentationml/2006/main" xmlns:r="http://schemas.openxmlformats.org/officeDocument/2006/relationships">
   <p:cSld>
+    <p:bg>
+      <p:bgPr>
+        <a:solidFill>
+          <a:srgbClr val="FBEFEC"/>
+        </a:solidFill>
+        <a:effectLst/>
+      </p:bgPr>
+    </p:bg>
     <p:spTree>
       <p:nvGrpSpPr>
         <p:cNvPr id="1" name=""/>
@@ -5042,30 +5388,120 @@
         <p:nvPr/>
       </p:nvGrpSpPr>
       <p:grpSpPr/>
-      <p:pic>
-        <p:nvPicPr>
-          <p:cNvPr id="3" name="표지 그림" descr="wedding-30.jpg"/>
-          <p:cNvPicPr>
-            <a:picLocks noChangeAspect="1"/>
-          </p:cNvPicPr>
+      <p:sp>
+        <p:nvSpPr>
+          <p:cNvPr id="3" name="사진 자리"/>
+          <p:cNvSpPr/>
           <p:nvPr/>
-        </p:nvPicPr>
-        <p:blipFill>
-          <a:blip r:embed="rId2"/>
-          <a:stretch>
-            <a:fillRect/>
-          </a:stretch>
-        </p:blipFill>
-        <p:spPr>
-          <a:xfrm>
-            <a:off x="0" y="0"/>
-            <a:ext cx="12191695" cy="6858000"/>
+        </p:nvSpPr>
+        <p:spPr>
+          <a:xfrm>
+            <a:off x="7071183" y="960120"/>
+            <a:ext cx="3657508" cy="4526280"/>
+          </a:xfrm>
+          <a:prstGeom prst="roundRect">
+            <a:avLst>
+              <a:gd name="adj" fmla="val 4000"/>
+            </a:avLst>
+          </a:prstGeom>
+          <a:solidFill>
+            <a:srgbClr val="EBBAAD"/>
+          </a:solidFill>
+          <a:ln>
+            <a:noFill/>
+          </a:ln>
+        </p:spPr>
+        <p:txBody>
+          <a:bodyPr rtlCol="0" anchor="ctr" wrap="square" lIns="54864" rIns="54864" tIns="27432" bIns="27432">
+            <a:noAutofit/>
+          </a:bodyPr>
+          <a:lstStyle/>
+          <a:p>
+            <a:pPr algn="ctr">
+              <a:lnSpc>
+                <a:spcPct val="100000"/>
+              </a:lnSpc>
+            </a:pPr>
+            <a:r>
+              <a:rPr sz="1400" b="0" i="0">
+                <a:solidFill>
+                  <a:srgbClr val="492E27"/>
+                </a:solidFill>
+              </a:rPr>
+              <a:t>사진을 넣어 주세요</a:t>
+            </a:r>
+          </a:p>
+        </p:txBody>
+      </p:sp>
+      <p:sp>
+        <p:nvSpPr>
+          <p:cNvPr id="4" name="장식"/>
+          <p:cNvSpPr/>
+          <p:nvPr/>
+        </p:nvSpPr>
+        <p:spPr>
+          <a:xfrm>
+            <a:off x="7558851" y="1234439"/>
+            <a:ext cx="3657508" cy="4526280"/>
+          </a:xfrm>
+          <a:prstGeom prst="roundRect">
+            <a:avLst>
+              <a:gd name="adj" fmla="val 4000"/>
+            </a:avLst>
+          </a:prstGeom>
+          <a:noFill/>
+          <a:ln w="9525">
+            <a:solidFill>
+              <a:srgbClr val="26231F"/>
+            </a:solidFill>
+          </a:ln>
+        </p:spPr>
+        <p:txBody>
+          <a:bodyPr rtlCol="0" anchor="ctr"/>
+          <a:lstStyle/>
+          <a:p>
+            <a:pPr algn="ctr"/>
+          </a:p>
+        </p:txBody>
+      </p:sp>
+      <p:sp>
+        <p:nvSpPr>
+          <p:cNvPr id="5" name="라벨"/>
+          <p:cNvSpPr txBox="1"/>
+          <p:nvPr/>
+        </p:nvSpPr>
+        <p:spPr>
+          <a:xfrm>
+            <a:off x="822960" y="2148840"/>
+            <a:ext cx="5608179" cy="274320"/>
           </a:xfrm>
           <a:prstGeom prst="rect">
             <a:avLst/>
           </a:prstGeom>
-        </p:spPr>
-      </p:pic>
+          <a:noFill/>
+        </p:spPr>
+        <p:txBody>
+          <a:bodyPr wrap="square" lIns="54864" rIns="54864" tIns="27432" bIns="27432" anchor="t">
+            <a:noAutofit/>
+          </a:bodyPr>
+          <a:lstStyle/>
+          <a:p>
+            <a:pPr algn="l">
+              <a:lnSpc>
+                <a:spcPct val="115000"/>
+              </a:lnSpc>
+            </a:pPr>
+            <a:r>
+              <a:rPr sz="1000" b="1" i="0" spc="250">
+                <a:solidFill>
+                  <a:srgbClr val="26231F"/>
+                </a:solidFill>
+              </a:rPr>
+              <a:t>WEDDING</a:t>
+            </a:r>
+          </a:p>
+        </p:txBody>
+      </p:sp>
       <p:sp>
         <p:nvSpPr>
           <p:cNvPr id="2" name="Title 1"/>
@@ -5078,8 +5514,8 @@
         </p:nvSpPr>
         <p:spPr>
           <a:xfrm>
-            <a:off x="853418" y="2057400"/>
-            <a:ext cx="6095847" cy="1554480"/>
+            <a:off x="822960" y="2606040"/>
+            <a:ext cx="5608179" cy="1188720"/>
           </a:xfrm>
         </p:spPr>
         <p:txBody>
@@ -5096,7 +5532,7 @@
             <a:r>
               <a:rPr sz="3400" b="1" i="0">
                 <a:solidFill>
-                  <a:srgbClr val="5B2315"/>
+                  <a:srgbClr val="26231F"/>
                 </a:solidFill>
               </a:rPr>
               <a:t>와 주셔서 고맙습니다</a:t>
@@ -5106,14 +5542,14 @@
       </p:sp>
       <p:sp>
         <p:nvSpPr>
-          <p:cNvPr id="4" name="한 줄 문구"/>
+          <p:cNvPr id="6" name="한 줄 문구"/>
           <p:cNvSpPr txBox="1"/>
           <p:nvPr/>
         </p:nvSpPr>
         <p:spPr>
           <a:xfrm>
-            <a:off x="853418" y="3749039"/>
-            <a:ext cx="6095847" cy="822960"/>
+            <a:off x="822960" y="3886200"/>
+            <a:ext cx="5608179" cy="822960"/>
           </a:xfrm>
           <a:prstGeom prst="rect">
             <a:avLst/>
@@ -5132,9 +5568,9 @@
               </a:lnSpc>
             </a:pPr>
             <a:r>
-              <a:rPr sz="1700" b="0" i="1">
-                <a:solidFill>
-                  <a:srgbClr val="5B2315"/>
+              <a:rPr sz="1700" b="0" i="0">
+                <a:solidFill>
+                  <a:srgbClr val="26231F"/>
                 </a:solidFill>
               </a:rPr>
               <a:t>잘 살겠습니다</a:t>
@@ -5144,14 +5580,14 @@
       </p:sp>
       <p:sp>
         <p:nvSpPr>
-          <p:cNvPr id="5" name="안내 문구"/>
+          <p:cNvPr id="7" name="안내 문구"/>
           <p:cNvSpPr txBox="1"/>
           <p:nvPr/>
         </p:nvSpPr>
         <p:spPr>
           <a:xfrm>
-            <a:off x="853418" y="4617720"/>
-            <a:ext cx="6095847" cy="914400"/>
+            <a:off x="822960" y="4754880"/>
+            <a:ext cx="5608179" cy="914400"/>
           </a:xfrm>
           <a:prstGeom prst="rect">
             <a:avLst/>
@@ -5172,7 +5608,7 @@
             <a:r>
               <a:rPr sz="1400" b="0" i="0">
                 <a:solidFill>
-                  <a:srgbClr val="666666"/>
+                  <a:srgbClr val="26231F"/>
                 </a:solidFill>
               </a:rPr>
               <a:t>신랑 이름 ♥ 신부 이름</a:t>
@@ -5199,34 +5635,34 @@
         <a:sysClr val="window" lastClr="FFFFFF"/>
       </a:lt1>
       <a:dk2>
-        <a:srgbClr val="5B2315"/>
+        <a:srgbClr val="492E27"/>
       </a:dk2>
       <a:lt2>
-        <a:srgbClr val="FBF1EE"/>
+        <a:srgbClr val="FBEFEC"/>
       </a:lt2>
       <a:accent1>
-        <a:srgbClr val="AE4329"/>
+        <a:srgbClr val="D88C79"/>
       </a:accent1>
       <a:accent2>
-        <a:srgbClr val="3B9177"/>
+        <a:srgbClr val="E1C998"/>
       </a:accent2>
       <a:accent3>
-        <a:srgbClr val="5B2315"/>
+        <a:srgbClr val="492E27"/>
       </a:accent3>
       <a:accent4>
-        <a:srgbClr val="F5D4CC"/>
+        <a:srgbClr val="F6DCD5"/>
       </a:accent4>
       <a:accent5>
-        <a:srgbClr val="746A50"/>
+        <a:srgbClr val="DCAA88"/>
       </a:accent5>
       <a:accent6>
-        <a:srgbClr val="9D7B73"/>
+        <a:srgbClr val="92827D"/>
       </a:accent6>
       <a:hlink>
-        <a:srgbClr val="AE4329"/>
+        <a:srgbClr val="D88C79"/>
       </a:hlink>
       <a:folHlink>
-        <a:srgbClr val="5B2315"/>
+        <a:srgbClr val="492E27"/>
       </a:folHlink>
     </a:clrScheme>
     <a:fontScheme name="Office">
